--- a/artifacts/PITWALL_TrackShift2026.pptx
+++ b/artifacts/PITWALL_TrackShift2026.pptx
@@ -3337,8 +3337,8 @@
         </p:nvSpPr>
         <p:spPr>
           <a:xfrm>
-            <a:off x="1097280" y="5806440"/>
-            <a:ext cx="10515600" cy="822960"/>
+            <a:off x="1097280" y="5669280"/>
+            <a:ext cx="10515600" cy="1005840"/>
           </a:xfrm>
           <a:prstGeom prst="rect">
             <a:avLst/>
@@ -3359,17 +3359,39 @@
                 <a:spcPts val="0"/>
               </a:spcBef>
               <a:spcAft>
+                <a:spcPts val="300"/>
+              </a:spcAft>
+            </a:pPr>
+            <a:r>
+              <a:rPr sz="1250" b="0" i="0">
+                <a:solidFill>
+                  <a:srgbClr val="C5CBD1"/>
+                </a:solidFill>
+                <a:latin typeface="Segoe UI"/>
+              </a:rPr>
+              <a:t>AI Motorsport Intelligence   ·   Tyre Degradation Intelligence</a:t>
+            </a:r>
+          </a:p>
+          <a:p>
+            <a:pPr algn="l">
+              <a:lnSpc>
+                <a:spcPct val="105000"/>
+              </a:lnSpc>
+              <a:spcBef>
+                <a:spcPts val="0"/>
+              </a:spcBef>
+              <a:spcAft>
                 <a:spcPts val="200"/>
               </a:spcAft>
             </a:pPr>
             <a:r>
-              <a:rPr sz="1250" b="0" i="0">
-                <a:solidFill>
-                  <a:srgbClr val="C5CBD1"/>
-                </a:solidFill>
-                <a:latin typeface="Segoe UI"/>
-              </a:rPr>
-              <a:t>AI Motorsport Intelligence   ·   Tyre Degradation Intelligence</a:t>
+              <a:rPr sz="1250" b="1" i="0">
+                <a:solidFill>
+                  <a:srgbClr val="0B6EA8"/>
+                </a:solidFill>
+                <a:latin typeface="Segoe UI"/>
+              </a:rPr>
+              <a:t>Team Handsome Squidward</a:t>
             </a:r>
           </a:p>
           <a:p>
@@ -3385,13 +3407,13 @@
               </a:spcAft>
             </a:pPr>
             <a:r>
-              <a:rPr sz="1250" b="1" i="0">
-                <a:solidFill>
-                  <a:srgbClr val="0B6EA8"/>
-                </a:solidFill>
-                <a:latin typeface="Segoe UI"/>
-              </a:rPr>
-              <a:t>Team ‹ your team name ›</a:t>
+              <a:rPr sz="1200" b="0" i="0">
+                <a:solidFill>
+                  <a:srgbClr val="9AA0A6"/>
+                </a:solidFill>
+                <a:latin typeface="Segoe UI"/>
+              </a:rPr>
+              <a:t>Aditya  ·  Ruhani</a:t>
             </a:r>
           </a:p>
         </p:txBody>
@@ -5269,8 +5291,8 @@
         </p:nvSpPr>
         <p:spPr>
           <a:xfrm>
-            <a:off x="1097280" y="5943600"/>
-            <a:ext cx="10058400" cy="548640"/>
+            <a:off x="1097280" y="5852160"/>
+            <a:ext cx="10515600" cy="822960"/>
           </a:xfrm>
           <a:prstGeom prst="rect">
             <a:avLst/>
@@ -5291,17 +5313,39 @@
                 <a:spcPts val="0"/>
               </a:spcBef>
               <a:spcAft>
-                <a:spcPts val="0"/>
+                <a:spcPts val="300"/>
               </a:spcAft>
             </a:pPr>
             <a:r>
               <a:rPr sz="1300" b="0" i="0">
                 <a:solidFill>
+                  <a:srgbClr val="C5CBD1"/>
+                </a:solidFill>
+                <a:latin typeface="Segoe UI"/>
+              </a:rPr>
+              <a:t>Team Handsome Squidward   ·   Aditya  ·  Ruhani</a:t>
+            </a:r>
+          </a:p>
+          <a:p>
+            <a:pPr algn="l">
+              <a:lnSpc>
+                <a:spcPct val="105000"/>
+              </a:lnSpc>
+              <a:spcBef>
+                <a:spcPts val="0"/>
+              </a:spcBef>
+              <a:spcAft>
+                <a:spcPts val="0"/>
+              </a:spcAft>
+            </a:pPr>
+            <a:r>
+              <a:rPr sz="1200" b="0" i="0">
+                <a:solidFill>
                   <a:srgbClr val="9AA0A6"/>
                 </a:solidFill>
                 <a:latin typeface="Segoe UI"/>
               </a:rPr>
-              <a:t>Team ‹ your team name ›   ·   AI Motorsport Intelligence   ·   TrackShift 2026</a:t>
+              <a:t>AI Motorsport Intelligence   ·   TrackShift 2026</a:t>
             </a:r>
           </a:p>
         </p:txBody>

--- a/artifacts/PITWALL_TrackShift2026.pptx
+++ b/artifacts/PITWALL_TrackShift2026.pptx
@@ -17,6 +17,7 @@
     <p:sldId id="265" r:id="rId16"/>
     <p:sldId id="266" r:id="rId17"/>
     <p:sldId id="267" r:id="rId18"/>
+    <p:sldId id="268" r:id="rId19"/>
   </p:sldIdLst>
   <p:sldSz cx="12191695" cy="6858000" type="screen4x3"/>
   <p:notesSz cx="6858000" cy="9144000"/>
@@ -3459,7 +3460,7 @@
             <a:avLst/>
           </a:prstGeom>
           <a:solidFill>
-            <a:srgbClr val="0B6EA8"/>
+            <a:srgbClr val="C0392B"/>
           </a:solidFill>
           <a:ln>
             <a:noFill/>
@@ -3524,11 +3525,11 @@
             <a:r>
               <a:rPr sz="1250" b="1" i="0">
                 <a:solidFill>
-                  <a:srgbClr val="0B6EA8"/>
-                </a:solidFill>
-                <a:latin typeface="Segoe UI"/>
-              </a:rPr>
-              <a:t>BEYOND MOTORSPORT</a:t>
+                  <a:srgbClr val="C0392B"/>
+                </a:solidFill>
+                <a:latin typeface="Segoe UI"/>
+              </a:rPr>
+              <a:t>WHAT WE CUT</a:t>
             </a:r>
           </a:p>
         </p:txBody>
@@ -3573,7 +3574,7 @@
                 </a:solidFill>
                 <a:latin typeface="Segoe UI"/>
               </a:rPr>
-              <a:t>The same trap sits in Indian fleet tyre management</a:t>
+              <a:t>Three features we built, tested, and killed</a:t>
             </a:r>
           </a:p>
         </p:txBody>
@@ -3586,8 +3587,8 @@
         </p:nvSpPr>
         <p:spPr>
           <a:xfrm>
-            <a:off x="548640" y="1920240"/>
-            <a:ext cx="6492240" cy="4297680"/>
+            <a:off x="548640" y="1874519"/>
+            <a:ext cx="5943600" cy="4389120"/>
           </a:xfrm>
           <a:prstGeom prst="rect">
             <a:avLst/>
@@ -3605,26 +3606,26 @@
                 <a:spcPct val="108000"/>
               </a:lnSpc>
               <a:spcAft>
-                <a:spcPts val="1200"/>
-              </a:spcAft>
-            </a:pPr>
-            <a:r>
-              <a:rPr sz="1550" b="1">
-                <a:solidFill>
-                  <a:srgbClr val="0B6EA8"/>
-                </a:solidFill>
-                <a:latin typeface="Segoe UI"/>
-              </a:rPr>
-              <a:t>▪   </a:t>
-            </a:r>
-            <a:r>
-              <a:rPr sz="1550">
+                <a:spcPts val="1100"/>
+              </a:spcAft>
+            </a:pPr>
+            <a:r>
+              <a:rPr sz="1450" b="1">
+                <a:solidFill>
+                  <a:srgbClr val="C0392B"/>
+                </a:solidFill>
+                <a:latin typeface="Segoe UI"/>
+              </a:rPr>
+              <a:t>1   </a:t>
+            </a:r>
+            <a:r>
+              <a:rPr sz="1450">
                 <a:solidFill>
                   <a:srgbClr val="0E1116"/>
                 </a:solidFill>
                 <a:latin typeface="Segoe UI"/>
               </a:rPr>
-              <a:t>The transferable method: recover a wear signal from confounded operating conditions, then validate on a natural experiment — never in sample.</a:t>
+              <a:t>The practice degradation curve. Clean in sample, and its stop-by-stop variation is uncorrelated with 288 real stops — calibration slope 0.006.</a:t>
             </a:r>
           </a:p>
           <a:p>
@@ -3633,26 +3634,26 @@
                 <a:spcPct val="108000"/>
               </a:lnSpc>
               <a:spcAft>
-                <a:spcPts val="1200"/>
-              </a:spcAft>
-            </a:pPr>
-            <a:r>
-              <a:rPr sz="1550" b="1">
-                <a:solidFill>
-                  <a:srgbClr val="0B6EA8"/>
-                </a:solidFill>
-                <a:latin typeface="Segoe UI"/>
-              </a:rPr>
-              <a:t>▪   </a:t>
-            </a:r>
-            <a:r>
-              <a:rPr sz="1550">
+                <a:spcPts val="1100"/>
+              </a:spcAft>
+            </a:pPr>
+            <a:r>
+              <a:rPr sz="1450" b="1">
+                <a:solidFill>
+                  <a:srgbClr val="C0392B"/>
+                </a:solidFill>
+                <a:latin typeface="Segoe UI"/>
+              </a:rPr>
+              <a:t>2   </a:t>
+            </a:r>
+            <a:r>
+              <a:rPr sz="1450">
                 <a:solidFill>
                   <a:srgbClr val="0E1116"/>
                 </a:solidFill>
                 <a:latin typeface="Segoe UI"/>
               </a:rPr>
-              <a:t>Target: Indian commercial-vehicle fleets. Wear is confounded by axle load, road roughness, ambient temperature and driver behaviour — structurally the identical problem.</a:t>
+              <a:t>The pit-lap recommendation. It covers 68.4% of real stops; the same window placed mid-race covers 65.8%. Per event a constant tracks the chosen lap better than we do (MAE 4.9 laps vs 8.4), and with race length divided out we carry no signal at all (r = +0.08, p = 0.80).</a:t>
             </a:r>
           </a:p>
           <a:p>
@@ -3661,26 +3662,26 @@
                 <a:spcPct val="108000"/>
               </a:lnSpc>
               <a:spcAft>
-                <a:spcPts val="1200"/>
-              </a:spcAft>
-            </a:pPr>
-            <a:r>
-              <a:rPr sz="1550" b="1">
-                <a:solidFill>
-                  <a:srgbClr val="0B6EA8"/>
-                </a:solidFill>
-                <a:latin typeface="Segoe UI"/>
-              </a:rPr>
-              <a:t>▪   </a:t>
-            </a:r>
-            <a:r>
-              <a:rPr sz="1550">
+                <a:spcPts val="1100"/>
+              </a:spcAft>
+            </a:pPr>
+            <a:r>
+              <a:rPr sz="1450" b="1">
+                <a:solidFill>
+                  <a:srgbClr val="C0392B"/>
+                </a:solidFill>
+                <a:latin typeface="Segoe UI"/>
+              </a:rPr>
+              <a:t>3   </a:t>
+            </a:r>
+            <a:r>
+              <a:rPr sz="1450">
                 <a:solidFill>
                   <a:srgbClr val="0E1116"/>
                 </a:solidFill>
                 <a:latin typeface="Segoe UI"/>
               </a:rPr>
-              <a:t>Tyre cost is a top controllable line item in Indian trucking, and tyre burst is a recognised cause of highway fatalities.</a:t>
+              <a:t>“You will gain a place.” Over 137 head-to-head duels our undercut margin ranks the winner at AUC 0.836 — and so does the gap alone, with no model. Our own term scored by itself is 0.490, a coin flip.</a:t>
             </a:r>
           </a:p>
           <a:p>
@@ -3693,22 +3694,22 @@
               </a:spcAft>
             </a:pPr>
             <a:r>
-              <a:rPr sz="1550" b="1">
-                <a:solidFill>
-                  <a:srgbClr val="1A7F4B"/>
+              <a:rPr sz="1450" b="1">
+                <a:solidFill>
+                  <a:srgbClr val="8A8A8A"/>
                 </a:solidFill>
                 <a:latin typeface="Segoe UI"/>
               </a:rPr>
               <a:t>→   </a:t>
             </a:r>
             <a:r>
-              <a:rPr sz="1550">
+              <a:rPr sz="1450">
                 <a:solidFill>
                   <a:srgbClr val="0E1116"/>
                 </a:solidFill>
                 <a:latin typeface="Segoe UI"/>
               </a:rPr>
-              <a:t>The warning transfers too: an in-sample wear curve can look excellent and carry almost no predictive value. Only a natural experiment reveals which you have.</a:t>
+              <a:t>The third one is arithmetic, not a bug: margin = gain − gap, and the gain we supply has sd 0.46 s against the gap's 14.6 s. A term 31× smaller cannot reorder anything.</a:t>
             </a:r>
           </a:p>
         </p:txBody>
@@ -3721,14 +3722,14 @@
         </p:nvSpPr>
         <p:spPr>
           <a:xfrm>
-            <a:off x="7360920" y="2011680"/>
-            <a:ext cx="4206240" cy="2880360"/>
+            <a:off x="6720840" y="1965960"/>
+            <a:ext cx="4846320" cy="4114800"/>
           </a:xfrm>
           <a:prstGeom prst="rect">
             <a:avLst/>
           </a:prstGeom>
           <a:solidFill>
-            <a:srgbClr val="0E1116"/>
+            <a:srgbClr val="F4F5F7"/>
           </a:solidFill>
           <a:ln>
             <a:noFill/>
@@ -3765,8 +3766,8 @@
         </p:nvSpPr>
         <p:spPr>
           <a:xfrm>
-            <a:off x="7635240" y="2286000"/>
-            <a:ext cx="3703320" cy="2377440"/>
+            <a:off x="6995160" y="2240280"/>
+            <a:ext cx="4297680" cy="3566160"/>
           </a:xfrm>
           <a:prstGeom prst="rect">
             <a:avLst/>
@@ -3787,105 +3788,203 @@
                 <a:spcPts val="0"/>
               </a:spcBef>
               <a:spcAft>
-                <a:spcPts val="1000"/>
-              </a:spcAft>
-            </a:pPr>
-            <a:r>
-              <a:rPr sz="1150" b="1" i="0">
+                <a:spcPts val="1400"/>
+              </a:spcAft>
+            </a:pPr>
+            <a:r>
+              <a:rPr sz="1200" b="1" i="0">
+                <a:solidFill>
+                  <a:srgbClr val="0B6EA8"/>
+                </a:solidFill>
+                <a:latin typeface="Segoe UI"/>
+              </a:rPr>
+              <a:t>WHAT SURVIVED CONTACT</a:t>
+            </a:r>
+          </a:p>
+          <a:p>
+            <a:pPr>
+              <a:spcAft>
+                <a:spcPts val="600"/>
+              </a:spcAft>
+            </a:pPr>
+            <a:r>
+              <a:rPr sz="1250">
+                <a:solidFill>
+                  <a:srgbClr val="0E1116"/>
+                </a:solidFill>
+                <a:latin typeface="Segoe UI"/>
+              </a:rPr>
+              <a:t>practice curve → a race</a:t>
+            </a:r>
+          </a:p>
+          <a:p>
+            <a:pPr>
+              <a:spcAft>
+                <a:spcPts val="1300"/>
+              </a:spcAft>
+            </a:pPr>
+            <a:r>
+              <a:rPr sz="1250" b="1">
+                <a:solidFill>
+                  <a:srgbClr val="C0392B"/>
+                </a:solidFill>
+                <a:latin typeface="Segoe UI"/>
+              </a:rPr>
+              <a:t>CUT   </a:t>
+            </a:r>
+            <a:r>
+              <a:rPr sz="1250">
+                <a:solidFill>
+                  <a:srgbClr val="8A8A8A"/>
+                </a:solidFill>
+                <a:latin typeface="Segoe UI"/>
+              </a:rPr>
+              <a:t>calib 0.006</a:t>
+            </a:r>
+          </a:p>
+          <a:p>
+            <a:pPr>
+              <a:spcAft>
+                <a:spcPts val="600"/>
+              </a:spcAft>
+            </a:pPr>
+            <a:r>
+              <a:rPr sz="1250">
+                <a:solidFill>
+                  <a:srgbClr val="0E1116"/>
+                </a:solidFill>
+                <a:latin typeface="Segoe UI"/>
+              </a:rPr>
+              <a:t>pit window → vs mid-race</a:t>
+            </a:r>
+          </a:p>
+          <a:p>
+            <a:pPr>
+              <a:spcAft>
+                <a:spcPts val="1300"/>
+              </a:spcAft>
+            </a:pPr>
+            <a:r>
+              <a:rPr sz="1250" b="1">
+                <a:solidFill>
+                  <a:srgbClr val="C0392B"/>
+                </a:solidFill>
+                <a:latin typeface="Segoe UI"/>
+              </a:rPr>
+              <a:t>CUT   </a:t>
+            </a:r>
+            <a:r>
+              <a:rPr sz="1250">
+                <a:solidFill>
+                  <a:srgbClr val="8A8A8A"/>
+                </a:solidFill>
+                <a:latin typeface="Segoe UI"/>
+              </a:rPr>
+              <a:t>68.4 / 65.8</a:t>
+            </a:r>
+          </a:p>
+          <a:p>
+            <a:pPr>
+              <a:spcAft>
+                <a:spcPts val="600"/>
+              </a:spcAft>
+            </a:pPr>
+            <a:r>
+              <a:rPr sz="1250">
+                <a:solidFill>
+                  <a:srgbClr val="0E1116"/>
+                </a:solidFill>
+                <a:latin typeface="Segoe UI"/>
+              </a:rPr>
+              <a:t>undercut → track position</a:t>
+            </a:r>
+          </a:p>
+          <a:p>
+            <a:pPr>
+              <a:spcAft>
+                <a:spcPts val="1300"/>
+              </a:spcAft>
+            </a:pPr>
+            <a:r>
+              <a:rPr sz="1250" b="1">
+                <a:solidFill>
+                  <a:srgbClr val="C0392B"/>
+                </a:solidFill>
+                <a:latin typeface="Segoe UI"/>
+              </a:rPr>
+              <a:t>CUT   </a:t>
+            </a:r>
+            <a:r>
+              <a:rPr sz="1250">
+                <a:solidFill>
+                  <a:srgbClr val="8A8A8A"/>
+                </a:solidFill>
+                <a:latin typeface="Segoe UI"/>
+              </a:rPr>
+              <a:t>AUC 0.836 / 0.836</a:t>
+            </a:r>
+          </a:p>
+          <a:p>
+            <a:pPr>
+              <a:spcAft>
+                <a:spcPts val="600"/>
+              </a:spcAft>
+            </a:pPr>
+            <a:r>
+              <a:rPr sz="1250">
+                <a:solidFill>
+                  <a:srgbClr val="0E1116"/>
+                </a:solidFill>
+                <a:latin typeface="Segoe UI"/>
+              </a:rPr>
+              <a:t>fresh-tyre pace → measured step</a:t>
+            </a:r>
+          </a:p>
+          <a:p>
+            <a:pPr>
+              <a:spcAft>
+                <a:spcPts val="1300"/>
+              </a:spcAft>
+            </a:pPr>
+            <a:r>
+              <a:rPr sz="1250" b="1">
+                <a:solidFill>
+                  <a:srgbClr val="1A7F4B"/>
+                </a:solidFill>
+                <a:latin typeface="Segoe UI"/>
+              </a:rPr>
+              <a:t>SHIPS   </a:t>
+            </a:r>
+            <a:r>
+              <a:rPr sz="1250">
+                <a:solidFill>
+                  <a:srgbClr val="8A8A8A"/>
+                </a:solidFill>
+                <a:latin typeface="Segoe UI"/>
+              </a:rPr>
+              <a:t>0.96 s/lap</a:t>
+            </a:r>
+          </a:p>
+          <a:p>
+            <a:pPr algn="l">
+              <a:lnSpc>
+                <a:spcPct val="105000"/>
+              </a:lnSpc>
+              <a:spcBef>
+                <a:spcPts val="0"/>
+              </a:spcBef>
+              <a:spcAft>
+                <a:spcPts val="0"/>
+              </a:spcAft>
+            </a:pPr>
+            <a:r>
+              <a:rPr sz="950" b="0" i="0">
                 <a:solidFill>
                   <a:srgbClr val="9AA0A6"/>
                 </a:solidFill>
                 <a:latin typeface="Segoe UI"/>
               </a:rPr>
-              <a:t>SAME MATH, NEW CONFOUNDERS</a:t>
-            </a:r>
-          </a:p>
-          <a:p>
-            <a:pPr algn="l">
-              <a:lnSpc>
-                <a:spcPct val="105000"/>
-              </a:lnSpc>
-              <a:spcBef>
-                <a:spcPts val="0"/>
-              </a:spcBef>
-              <a:spcAft>
-                <a:spcPts val="500"/>
-              </a:spcAft>
-            </a:pPr>
-            <a:r>
-              <a:rPr sz="1500" b="0" i="0">
-                <a:solidFill>
-                  <a:srgbClr val="FFFFFF"/>
-                </a:solidFill>
-                <a:latin typeface="Segoe UI"/>
-              </a:rPr>
-              <a:t>fuel → axle load</a:t>
-            </a:r>
-          </a:p>
-          <a:p>
-            <a:pPr algn="l">
-              <a:lnSpc>
-                <a:spcPct val="105000"/>
-              </a:lnSpc>
-              <a:spcBef>
-                <a:spcPts val="0"/>
-              </a:spcBef>
-              <a:spcAft>
-                <a:spcPts val="500"/>
-              </a:spcAft>
-            </a:pPr>
-            <a:r>
-              <a:rPr sz="1500" b="0" i="0">
-                <a:solidFill>
-                  <a:srgbClr val="FFFFFF"/>
-                </a:solidFill>
-                <a:latin typeface="Segoe UI"/>
-              </a:rPr>
-              <a:t>traffic → road roughness</a:t>
-            </a:r>
-          </a:p>
-          <a:p>
-            <a:pPr algn="l">
-              <a:lnSpc>
-                <a:spcPct val="105000"/>
-              </a:lnSpc>
-              <a:spcBef>
-                <a:spcPts val="0"/>
-              </a:spcBef>
-              <a:spcAft>
-                <a:spcPts val="500"/>
-              </a:spcAft>
-            </a:pPr>
-            <a:r>
-              <a:rPr sz="1500" b="0" i="0">
-                <a:solidFill>
-                  <a:srgbClr val="FFFFFF"/>
-                </a:solidFill>
-                <a:latin typeface="Segoe UI"/>
-              </a:rPr>
-              <a:t>track evo → ambient temp</a:t>
-            </a:r>
-          </a:p>
-          <a:p>
-            <a:pPr algn="l">
-              <a:lnSpc>
-                <a:spcPct val="105000"/>
-              </a:lnSpc>
-              <a:spcBef>
-                <a:spcPts val="0"/>
-              </a:spcBef>
-              <a:spcAft>
-                <a:spcPts val="0"/>
-              </a:spcAft>
-            </a:pPr>
-            <a:r>
-              <a:rPr sz="1500" b="0" i="0">
-                <a:solidFill>
-                  <a:srgbClr val="FFFFFF"/>
-                </a:solidFill>
-                <a:latin typeface="Segoe UI"/>
-              </a:rPr>
-              <a:t>pit stop → tyre swap record</a:t>
+              <a:t>check_window_placebo.py  ·  check_undercut_backtest.py</a:t>
             </a:r>
           </a:p>
         </p:txBody>
@@ -4090,7 +4189,7 @@
                 </a:solidFill>
                 <a:latin typeface="Segoe UI"/>
               </a:rPr>
-              <a:t>STACK</a:t>
+              <a:t>BEYOND MOTORSPORT</a:t>
             </a:r>
           </a:p>
         </p:txBody>
@@ -4135,7 +4234,7 @@
                 </a:solidFill>
                 <a:latin typeface="Segoe UI"/>
               </a:rPr>
-              <a:t>Built on real telemetry, reproducible end to end</a:t>
+              <a:t>The same trap sits in Indian fleet tyre management</a:t>
             </a:r>
           </a:p>
         </p:txBody>
@@ -4148,8 +4247,8 @@
         </p:nvSpPr>
         <p:spPr>
           <a:xfrm>
-            <a:off x="548640" y="1965960"/>
-            <a:ext cx="3657600" cy="4206240"/>
+            <a:off x="548640" y="1920240"/>
+            <a:ext cx="6492240" cy="4297680"/>
           </a:xfrm>
           <a:prstGeom prst="rect">
             <a:avLst/>
@@ -4162,277 +4261,160 @@
           </a:bodyPr>
           <a:lstStyle/>
           <a:p>
-            <a:pPr algn="l">
-              <a:lnSpc>
-                <a:spcPct val="105000"/>
-              </a:lnSpc>
-              <a:spcBef>
-                <a:spcPts val="0"/>
-              </a:spcBef>
-              <a:spcAft>
-                <a:spcPts val="800"/>
-              </a:spcAft>
-            </a:pPr>
-            <a:r>
-              <a:rPr sz="1300" b="1" i="0">
+            <a:pPr>
+              <a:lnSpc>
+                <a:spcPct val="108000"/>
+              </a:lnSpc>
+              <a:spcAft>
+                <a:spcPts val="1200"/>
+              </a:spcAft>
+            </a:pPr>
+            <a:r>
+              <a:rPr sz="1550" b="1">
                 <a:solidFill>
                   <a:srgbClr val="0B6EA8"/>
                 </a:solidFill>
                 <a:latin typeface="Segoe UI"/>
               </a:rPr>
-              <a:t>DATA</a:t>
-            </a:r>
-          </a:p>
-          <a:p>
-            <a:pPr algn="l">
-              <a:lnSpc>
-                <a:spcPct val="105000"/>
-              </a:lnSpc>
-              <a:spcBef>
-                <a:spcPts val="0"/>
-              </a:spcBef>
-              <a:spcAft>
-                <a:spcPts val="300"/>
-              </a:spcAft>
-            </a:pPr>
-            <a:r>
-              <a:rPr sz="1450" b="1" i="0">
+              <a:t>▪   </a:t>
+            </a:r>
+            <a:r>
+              <a:rPr sz="1550">
                 <a:solidFill>
                   <a:srgbClr val="0E1116"/>
                 </a:solidFill>
                 <a:latin typeface="Segoe UI"/>
               </a:rPr>
-              <a:t>FastF1 — full 2026 F1 season</a:t>
-            </a:r>
-          </a:p>
-          <a:p>
-            <a:pPr algn="l">
-              <a:lnSpc>
-                <a:spcPct val="105000"/>
-              </a:lnSpc>
-              <a:spcBef>
-                <a:spcPts val="0"/>
-              </a:spcBef>
-              <a:spcAft>
-                <a:spcPts val="600"/>
-              </a:spcAft>
-            </a:pPr>
-            <a:r>
-              <a:rPr sz="1350" b="0" i="0">
-                <a:solidFill>
-                  <a:srgbClr val="8A8A8A"/>
-                </a:solidFill>
-                <a:latin typeface="Segoe UI"/>
-              </a:rPr>
-              <a:t>14,310 laps · 12 events · 1,068 runs</a:t>
-            </a:r>
-          </a:p>
-          <a:p>
-            <a:pPr algn="l">
-              <a:lnSpc>
-                <a:spcPct val="112000"/>
-              </a:lnSpc>
-              <a:spcBef>
-                <a:spcPts val="0"/>
-              </a:spcBef>
-              <a:spcAft>
-                <a:spcPts val="0"/>
-              </a:spcAft>
-            </a:pPr>
-            <a:r>
-              <a:rPr sz="1350" b="0" i="0">
+              <a:t>The transferable method: recover a wear signal from confounded operating conditions, then validate on a natural experiment — never in sample.</a:t>
+            </a:r>
+          </a:p>
+          <a:p>
+            <a:pPr>
+              <a:lnSpc>
+                <a:spcPct val="108000"/>
+              </a:lnSpc>
+              <a:spcAft>
+                <a:spcPts val="1200"/>
+              </a:spcAft>
+            </a:pPr>
+            <a:r>
+              <a:rPr sz="1550" b="1">
+                <a:solidFill>
+                  <a:srgbClr val="0B6EA8"/>
+                </a:solidFill>
+                <a:latin typeface="Segoe UI"/>
+              </a:rPr>
+              <a:t>▪   </a:t>
+            </a:r>
+            <a:r>
+              <a:rPr sz="1550">
                 <a:solidFill>
                   <a:srgbClr val="0E1116"/>
                 </a:solidFill>
                 <a:latin typeface="Segoe UI"/>
               </a:rPr>
-              <a:t>Per-lap timing, tyre compound and age, plus 4–10 Hz car position telemetry.</a:t>
-            </a:r>
-          </a:p>
-        </p:txBody>
-      </p:sp>
-      <p:sp>
-        <p:nvSpPr>
-          <p:cNvPr id="6" name="TextBox 5"/>
-          <p:cNvSpPr txBox="1"/>
+              <a:t>Target: Indian commercial-vehicle fleets. Wear is confounded by axle load, road roughness, ambient temperature and driver behaviour — structurally the identical problem.</a:t>
+            </a:r>
+          </a:p>
+          <a:p>
+            <a:pPr>
+              <a:lnSpc>
+                <a:spcPct val="108000"/>
+              </a:lnSpc>
+              <a:spcAft>
+                <a:spcPts val="1200"/>
+              </a:spcAft>
+            </a:pPr>
+            <a:r>
+              <a:rPr sz="1550" b="1">
+                <a:solidFill>
+                  <a:srgbClr val="0B6EA8"/>
+                </a:solidFill>
+                <a:latin typeface="Segoe UI"/>
+              </a:rPr>
+              <a:t>▪   </a:t>
+            </a:r>
+            <a:r>
+              <a:rPr sz="1550">
+                <a:solidFill>
+                  <a:srgbClr val="0E1116"/>
+                </a:solidFill>
+                <a:latin typeface="Segoe UI"/>
+              </a:rPr>
+              <a:t>Tyre cost is a top controllable line item in Indian trucking, and tyre burst is a recognised cause of highway fatalities.</a:t>
+            </a:r>
+          </a:p>
+          <a:p>
+            <a:pPr>
+              <a:lnSpc>
+                <a:spcPct val="108000"/>
+              </a:lnSpc>
+              <a:spcAft>
+                <a:spcPts val="0"/>
+              </a:spcAft>
+            </a:pPr>
+            <a:r>
+              <a:rPr sz="1550" b="1">
+                <a:solidFill>
+                  <a:srgbClr val="1A7F4B"/>
+                </a:solidFill>
+                <a:latin typeface="Segoe UI"/>
+              </a:rPr>
+              <a:t>→   </a:t>
+            </a:r>
+            <a:r>
+              <a:rPr sz="1550">
+                <a:solidFill>
+                  <a:srgbClr val="0E1116"/>
+                </a:solidFill>
+                <a:latin typeface="Segoe UI"/>
+              </a:rPr>
+              <a:t>The warning transfers too: an in-sample wear curve can look excellent and carry almost no predictive value. Only a natural experiment reveals which you have.</a:t>
+            </a:r>
+          </a:p>
+        </p:txBody>
+      </p:sp>
+      <p:sp>
+        <p:nvSpPr>
+          <p:cNvPr id="6" name="Rectangle 5"/>
+          <p:cNvSpPr/>
           <p:nvPr/>
         </p:nvSpPr>
         <p:spPr>
           <a:xfrm>
-            <a:off x="4434840" y="1965960"/>
-            <a:ext cx="3657600" cy="4206240"/>
-          </a:xfrm>
-          <a:prstGeom prst="rect">
-            <a:avLst/>
-          </a:prstGeom>
-          <a:noFill/>
-        </p:spPr>
-        <p:txBody>
-          <a:bodyPr wrap="square">
-            <a:spAutoFit/>
-          </a:bodyPr>
-          <a:lstStyle/>
-          <a:p>
-            <a:pPr algn="l">
-              <a:lnSpc>
-                <a:spcPct val="105000"/>
-              </a:lnSpc>
-              <a:spcBef>
-                <a:spcPts val="0"/>
-              </a:spcBef>
-              <a:spcAft>
-                <a:spcPts val="800"/>
-              </a:spcAft>
-            </a:pPr>
-            <a:r>
-              <a:rPr sz="1300" b="1" i="0">
-                <a:solidFill>
-                  <a:srgbClr val="0B6EA8"/>
-                </a:solidFill>
-                <a:latin typeface="Segoe UI"/>
-              </a:rPr>
-              <a:t>METHODS</a:t>
-            </a:r>
-          </a:p>
-          <a:p>
-            <a:pPr>
-              <a:lnSpc>
-                <a:spcPct val="108000"/>
-              </a:lnSpc>
-              <a:spcAft>
-                <a:spcPts val="800"/>
-              </a:spcAft>
-            </a:pPr>
-            <a:r>
-              <a:rPr sz="1350" b="1">
-                <a:solidFill>
-                  <a:srgbClr val="0B6EA8"/>
-                </a:solidFill>
-                <a:latin typeface="Segoe UI"/>
-              </a:rPr>
-              <a:t>•   </a:t>
-            </a:r>
-            <a:r>
-              <a:rPr sz="1350">
-                <a:solidFill>
-                  <a:srgbClr val="0E1116"/>
-                </a:solidFill>
-                <a:latin typeface="Segoe UI"/>
-              </a:rPr>
-              <a:t>Two-stage hierarchical fuel + degradation model</a:t>
-            </a:r>
-          </a:p>
-          <a:p>
-            <a:pPr>
-              <a:lnSpc>
-                <a:spcPct val="108000"/>
-              </a:lnSpc>
-              <a:spcAft>
-                <a:spcPts val="800"/>
-              </a:spcAft>
-            </a:pPr>
-            <a:r>
-              <a:rPr sz="1350" b="1">
-                <a:solidFill>
-                  <a:srgbClr val="0B6EA8"/>
-                </a:solidFill>
-                <a:latin typeface="Segoe UI"/>
-              </a:rPr>
-              <a:t>•   </a:t>
-            </a:r>
-            <a:r>
-              <a:rPr sz="1350">
-                <a:solidFill>
-                  <a:srgbClr val="0E1116"/>
-                </a:solidFill>
-                <a:latin typeface="Segoe UI"/>
-              </a:rPr>
-              <a:t>Frisch–Waugh–Lovell demeaning absorbs ~1,100 run fixed effects</a:t>
-            </a:r>
-          </a:p>
-          <a:p>
-            <a:pPr>
-              <a:lnSpc>
-                <a:spcPct val="108000"/>
-              </a:lnSpc>
-              <a:spcAft>
-                <a:spcPts val="800"/>
-              </a:spcAft>
-            </a:pPr>
-            <a:r>
-              <a:rPr sz="1350" b="1">
-                <a:solidFill>
-                  <a:srgbClr val="0B6EA8"/>
-                </a:solidFill>
-                <a:latin typeface="Segoe UI"/>
-              </a:rPr>
-              <a:t>•   </a:t>
-            </a:r>
-            <a:r>
-              <a:rPr sz="1350">
-                <a:solidFill>
-                  <a:srgbClr val="0E1116"/>
-                </a:solidFill>
-                <a:latin typeface="Segoe UI"/>
-              </a:rPr>
-              <a:t>Cluster-robust standard errors</a:t>
-            </a:r>
-          </a:p>
-          <a:p>
-            <a:pPr>
-              <a:lnSpc>
-                <a:spcPct val="108000"/>
-              </a:lnSpc>
-              <a:spcAft>
-                <a:spcPts val="800"/>
-              </a:spcAft>
-            </a:pPr>
-            <a:r>
-              <a:rPr sz="1350" b="1">
-                <a:solidFill>
-                  <a:srgbClr val="0B6EA8"/>
-                </a:solidFill>
-                <a:latin typeface="Segoe UI"/>
-              </a:rPr>
-              <a:t>•   </a:t>
-            </a:r>
-            <a:r>
-              <a:rPr sz="1350">
-                <a:solidFill>
-                  <a:srgbClr val="0E1116"/>
-                </a:solidFill>
-                <a:latin typeface="Segoe UI"/>
-              </a:rPr>
-              <a:t>KD-tree racing-line traffic measurement</a:t>
-            </a:r>
-          </a:p>
-          <a:p>
-            <a:pPr>
-              <a:lnSpc>
-                <a:spcPct val="108000"/>
-              </a:lnSpc>
-              <a:spcAft>
-                <a:spcPts val="800"/>
-              </a:spcAft>
-            </a:pPr>
-            <a:r>
-              <a:rPr sz="1350" b="1">
-                <a:solidFill>
-                  <a:srgbClr val="0B6EA8"/>
-                </a:solidFill>
-                <a:latin typeface="Segoe UI"/>
-              </a:rPr>
-              <a:t>•   </a:t>
-            </a:r>
-            <a:r>
-              <a:rPr sz="1350">
-                <a:solidFill>
-                  <a:srgbClr val="0E1116"/>
-                </a:solidFill>
-                <a:latin typeface="Segoe UI"/>
-              </a:rPr>
-              <a:t>Profile likelihood over the saturating form</a:t>
-            </a:r>
+            <a:off x="7360920" y="2011680"/>
+            <a:ext cx="4206240" cy="2880360"/>
+          </a:xfrm>
+          <a:prstGeom prst="rect">
+            <a:avLst/>
+          </a:prstGeom>
+          <a:solidFill>
+            <a:srgbClr val="0E1116"/>
+          </a:solidFill>
+          <a:ln>
+            <a:noFill/>
+          </a:ln>
+          <a:effectLst/>
+        </p:spPr>
+        <p:style>
+          <a:lnRef idx="1">
+            <a:schemeClr val="accent1"/>
+          </a:lnRef>
+          <a:fillRef idx="3">
+            <a:schemeClr val="accent1"/>
+          </a:fillRef>
+          <a:effectRef idx="2">
+            <a:schemeClr val="accent1"/>
+          </a:effectRef>
+          <a:fontRef idx="minor">
+            <a:schemeClr val="lt1"/>
+          </a:fontRef>
+        </p:style>
+        <p:txBody>
+          <a:bodyPr rtlCol="0" anchor="ctr"/>
+          <a:lstStyle/>
+          <a:p>
+            <a:pPr algn="ctr"/>
           </a:p>
         </p:txBody>
       </p:sp>
@@ -4444,8 +4426,8 @@
         </p:nvSpPr>
         <p:spPr>
           <a:xfrm>
-            <a:off x="8321040" y="1965960"/>
-            <a:ext cx="3383280" cy="4206240"/>
+            <a:off x="7635240" y="2286000"/>
+            <a:ext cx="3703320" cy="2377440"/>
           </a:xfrm>
           <a:prstGeom prst="rect">
             <a:avLst/>
@@ -4453,7 +4435,7 @@
           <a:noFill/>
         </p:spPr>
         <p:txBody>
-          <a:bodyPr wrap="square">
+          <a:bodyPr wrap="square" anchor="ctr">
             <a:spAutoFit/>
           </a:bodyPr>
           <a:lstStyle/>
@@ -4466,17 +4448,17 @@
                 <a:spcPts val="0"/>
               </a:spcBef>
               <a:spcAft>
-                <a:spcPts val="800"/>
-              </a:spcAft>
-            </a:pPr>
-            <a:r>
-              <a:rPr sz="1300" b="1" i="0">
-                <a:solidFill>
-                  <a:srgbClr val="0B6EA8"/>
-                </a:solidFill>
-                <a:latin typeface="Segoe UI"/>
-              </a:rPr>
-              <a:t>TOOLS</a:t>
+                <a:spcPts val="1000"/>
+              </a:spcAft>
+            </a:pPr>
+            <a:r>
+              <a:rPr sz="1150" b="1" i="0">
+                <a:solidFill>
+                  <a:srgbClr val="9AA0A6"/>
+                </a:solidFill>
+                <a:latin typeface="Segoe UI"/>
+              </a:rPr>
+              <a:t>SAME MATH, NEW CONFOUNDERS</a:t>
             </a:r>
           </a:p>
           <a:p>
@@ -4488,39 +4470,39 @@
                 <a:spcPts val="0"/>
               </a:spcBef>
               <a:spcAft>
-                <a:spcPts val="300"/>
-              </a:spcAft>
-            </a:pPr>
-            <a:r>
-              <a:rPr sz="1450" b="1" i="0">
-                <a:solidFill>
-                  <a:srgbClr val="0E1116"/>
-                </a:solidFill>
-                <a:latin typeface="Segoe UI"/>
-              </a:rPr>
-              <a:t>Python</a:t>
+                <a:spcPts val="500"/>
+              </a:spcAft>
+            </a:pPr>
+            <a:r>
+              <a:rPr sz="1500" b="0" i="0">
+                <a:solidFill>
+                  <a:srgbClr val="FFFFFF"/>
+                </a:solidFill>
+                <a:latin typeface="Segoe UI"/>
+              </a:rPr>
+              <a:t>fuel → axle load</a:t>
             </a:r>
           </a:p>
           <a:p>
             <a:pPr algn="l">
               <a:lnSpc>
-                <a:spcPct val="115000"/>
+                <a:spcPct val="105000"/>
               </a:lnSpc>
               <a:spcBef>
                 <a:spcPts val="0"/>
               </a:spcBef>
               <a:spcAft>
-                <a:spcPts val="1000"/>
-              </a:spcAft>
-            </a:pPr>
-            <a:r>
-              <a:rPr sz="1350" b="0" i="0">
-                <a:solidFill>
-                  <a:srgbClr val="0E1116"/>
-                </a:solidFill>
-                <a:latin typeface="Segoe UI"/>
-              </a:rPr>
-              <a:t>pandas · NumPy · statsmodels · SciPy · matplotlib</a:t>
+                <a:spcPts val="500"/>
+              </a:spcAft>
+            </a:pPr>
+            <a:r>
+              <a:rPr sz="1500" b="0" i="0">
+                <a:solidFill>
+                  <a:srgbClr val="FFFFFF"/>
+                </a:solidFill>
+                <a:latin typeface="Segoe UI"/>
+              </a:rPr>
+              <a:t>traffic → road roughness</a:t>
             </a:r>
           </a:p>
           <a:p>
@@ -4532,23 +4514,23 @@
                 <a:spcPts val="0"/>
               </a:spcBef>
               <a:spcAft>
-                <a:spcPts val="800"/>
-              </a:spcAft>
-            </a:pPr>
-            <a:r>
-              <a:rPr sz="1300" b="1" i="0">
-                <a:solidFill>
-                  <a:srgbClr val="0B6EA8"/>
-                </a:solidFill>
-                <a:latin typeface="Segoe UI"/>
-              </a:rPr>
-              <a:t>REPRODUCIBILITY</a:t>
+                <a:spcPts val="500"/>
+              </a:spcAft>
+            </a:pPr>
+            <a:r>
+              <a:rPr sz="1500" b="0" i="0">
+                <a:solidFill>
+                  <a:srgbClr val="FFFFFF"/>
+                </a:solidFill>
+                <a:latin typeface="Segoe UI"/>
+              </a:rPr>
+              <a:t>track evo → ambient temp</a:t>
             </a:r>
           </a:p>
           <a:p>
             <a:pPr algn="l">
               <a:lnSpc>
-                <a:spcPct val="115000"/>
+                <a:spcPct val="105000"/>
               </a:lnSpc>
               <a:spcBef>
                 <a:spcPts val="0"/>
@@ -4558,13 +4540,13 @@
               </a:spcAft>
             </a:pPr>
             <a:r>
-              <a:rPr sz="1350" b="0" i="0">
-                <a:solidFill>
-                  <a:srgbClr val="0E1116"/>
-                </a:solidFill>
-                <a:latin typeface="Segoe UI"/>
-              </a:rPr>
-              <a:t>One script regenerates every number and figure from the cached season.</a:t>
+              <a:rPr sz="1500" b="0" i="0">
+                <a:solidFill>
+                  <a:srgbClr val="FFFFFF"/>
+                </a:solidFill>
+                <a:latin typeface="Segoe UI"/>
+              </a:rPr>
+              <a:t>pit stop → tyre swap record</a:t>
             </a:r>
           </a:p>
         </p:txBody>
@@ -4668,6 +4650,685 @@
 </file>
 
 <file path=ppt/slides/slide12.xml><?xml version="1.0" encoding="utf-8"?>
+<p:sld xmlns:a="http://schemas.openxmlformats.org/drawingml/2006/main" xmlns:p="http://schemas.openxmlformats.org/presentationml/2006/main" xmlns:r="http://schemas.openxmlformats.org/officeDocument/2006/relationships">
+  <p:cSld>
+    <p:bg>
+      <p:bgPr>
+        <a:solidFill>
+          <a:srgbClr val="FFFFFF"/>
+        </a:solidFill>
+        <a:effectLst/>
+      </p:bgPr>
+    </p:bg>
+    <p:spTree>
+      <p:nvGrpSpPr>
+        <p:cNvPr id="1" name=""/>
+        <p:cNvGrpSpPr/>
+        <p:nvPr/>
+      </p:nvGrpSpPr>
+      <p:grpSpPr/>
+      <p:sp>
+        <p:nvSpPr>
+          <p:cNvPr id="2" name="Rectangle 1"/>
+          <p:cNvSpPr/>
+          <p:nvPr/>
+        </p:nvSpPr>
+        <p:spPr>
+          <a:xfrm>
+            <a:off x="502920" y="548640"/>
+            <a:ext cx="777240" cy="64008"/>
+          </a:xfrm>
+          <a:prstGeom prst="rect">
+            <a:avLst/>
+          </a:prstGeom>
+          <a:solidFill>
+            <a:srgbClr val="0B6EA8"/>
+          </a:solidFill>
+          <a:ln>
+            <a:noFill/>
+          </a:ln>
+          <a:effectLst/>
+        </p:spPr>
+        <p:style>
+          <a:lnRef idx="1">
+            <a:schemeClr val="accent1"/>
+          </a:lnRef>
+          <a:fillRef idx="3">
+            <a:schemeClr val="accent1"/>
+          </a:fillRef>
+          <a:effectRef idx="2">
+            <a:schemeClr val="accent1"/>
+          </a:effectRef>
+          <a:fontRef idx="minor">
+            <a:schemeClr val="lt1"/>
+          </a:fontRef>
+        </p:style>
+        <p:txBody>
+          <a:bodyPr rtlCol="0" anchor="ctr"/>
+          <a:lstStyle/>
+          <a:p>
+            <a:pPr algn="ctr"/>
+          </a:p>
+        </p:txBody>
+      </p:sp>
+      <p:sp>
+        <p:nvSpPr>
+          <p:cNvPr id="3" name="TextBox 2"/>
+          <p:cNvSpPr txBox="1"/>
+          <p:nvPr/>
+        </p:nvSpPr>
+        <p:spPr>
+          <a:xfrm>
+            <a:off x="502920" y="621792"/>
+            <a:ext cx="11155680" cy="320040"/>
+          </a:xfrm>
+          <a:prstGeom prst="rect">
+            <a:avLst/>
+          </a:prstGeom>
+          <a:noFill/>
+        </p:spPr>
+        <p:txBody>
+          <a:bodyPr wrap="square">
+            <a:spAutoFit/>
+          </a:bodyPr>
+          <a:lstStyle/>
+          <a:p>
+            <a:pPr algn="l">
+              <a:lnSpc>
+                <a:spcPct val="105000"/>
+              </a:lnSpc>
+              <a:spcBef>
+                <a:spcPts val="0"/>
+              </a:spcBef>
+              <a:spcAft>
+                <a:spcPts val="0"/>
+              </a:spcAft>
+            </a:pPr>
+            <a:r>
+              <a:rPr sz="1250" b="1" i="0">
+                <a:solidFill>
+                  <a:srgbClr val="0B6EA8"/>
+                </a:solidFill>
+                <a:latin typeface="Segoe UI"/>
+              </a:rPr>
+              <a:t>STACK</a:t>
+            </a:r>
+          </a:p>
+        </p:txBody>
+      </p:sp>
+      <p:sp>
+        <p:nvSpPr>
+          <p:cNvPr id="4" name="TextBox 3"/>
+          <p:cNvSpPr txBox="1"/>
+          <p:nvPr/>
+        </p:nvSpPr>
+        <p:spPr>
+          <a:xfrm>
+            <a:off x="457200" y="896112"/>
+            <a:ext cx="11338560" cy="914400"/>
+          </a:xfrm>
+          <a:prstGeom prst="rect">
+            <a:avLst/>
+          </a:prstGeom>
+          <a:noFill/>
+        </p:spPr>
+        <p:txBody>
+          <a:bodyPr wrap="square">
+            <a:spAutoFit/>
+          </a:bodyPr>
+          <a:lstStyle/>
+          <a:p>
+            <a:pPr algn="l">
+              <a:lnSpc>
+                <a:spcPct val="100000"/>
+              </a:lnSpc>
+              <a:spcBef>
+                <a:spcPts val="0"/>
+              </a:spcBef>
+              <a:spcAft>
+                <a:spcPts val="0"/>
+              </a:spcAft>
+            </a:pPr>
+            <a:r>
+              <a:rPr sz="2900" b="1" i="0">
+                <a:solidFill>
+                  <a:srgbClr val="0E1116"/>
+                </a:solidFill>
+                <a:latin typeface="Segoe UI"/>
+              </a:rPr>
+              <a:t>Built on real telemetry, reproducible end to end</a:t>
+            </a:r>
+          </a:p>
+        </p:txBody>
+      </p:sp>
+      <p:sp>
+        <p:nvSpPr>
+          <p:cNvPr id="5" name="TextBox 4"/>
+          <p:cNvSpPr txBox="1"/>
+          <p:nvPr/>
+        </p:nvSpPr>
+        <p:spPr>
+          <a:xfrm>
+            <a:off x="548640" y="1965960"/>
+            <a:ext cx="3657600" cy="4206240"/>
+          </a:xfrm>
+          <a:prstGeom prst="rect">
+            <a:avLst/>
+          </a:prstGeom>
+          <a:noFill/>
+        </p:spPr>
+        <p:txBody>
+          <a:bodyPr wrap="square">
+            <a:spAutoFit/>
+          </a:bodyPr>
+          <a:lstStyle/>
+          <a:p>
+            <a:pPr algn="l">
+              <a:lnSpc>
+                <a:spcPct val="105000"/>
+              </a:lnSpc>
+              <a:spcBef>
+                <a:spcPts val="0"/>
+              </a:spcBef>
+              <a:spcAft>
+                <a:spcPts val="800"/>
+              </a:spcAft>
+            </a:pPr>
+            <a:r>
+              <a:rPr sz="1300" b="1" i="0">
+                <a:solidFill>
+                  <a:srgbClr val="0B6EA8"/>
+                </a:solidFill>
+                <a:latin typeface="Segoe UI"/>
+              </a:rPr>
+              <a:t>DATA</a:t>
+            </a:r>
+          </a:p>
+          <a:p>
+            <a:pPr algn="l">
+              <a:lnSpc>
+                <a:spcPct val="105000"/>
+              </a:lnSpc>
+              <a:spcBef>
+                <a:spcPts val="0"/>
+              </a:spcBef>
+              <a:spcAft>
+                <a:spcPts val="300"/>
+              </a:spcAft>
+            </a:pPr>
+            <a:r>
+              <a:rPr sz="1450" b="1" i="0">
+                <a:solidFill>
+                  <a:srgbClr val="0E1116"/>
+                </a:solidFill>
+                <a:latin typeface="Segoe UI"/>
+              </a:rPr>
+              <a:t>FastF1 — full 2026 F1 season</a:t>
+            </a:r>
+          </a:p>
+          <a:p>
+            <a:pPr algn="l">
+              <a:lnSpc>
+                <a:spcPct val="105000"/>
+              </a:lnSpc>
+              <a:spcBef>
+                <a:spcPts val="0"/>
+              </a:spcBef>
+              <a:spcAft>
+                <a:spcPts val="600"/>
+              </a:spcAft>
+            </a:pPr>
+            <a:r>
+              <a:rPr sz="1350" b="0" i="0">
+                <a:solidFill>
+                  <a:srgbClr val="8A8A8A"/>
+                </a:solidFill>
+                <a:latin typeface="Segoe UI"/>
+              </a:rPr>
+              <a:t>14,310 laps · 12 events · 1,068 runs</a:t>
+            </a:r>
+          </a:p>
+          <a:p>
+            <a:pPr algn="l">
+              <a:lnSpc>
+                <a:spcPct val="112000"/>
+              </a:lnSpc>
+              <a:spcBef>
+                <a:spcPts val="0"/>
+              </a:spcBef>
+              <a:spcAft>
+                <a:spcPts val="0"/>
+              </a:spcAft>
+            </a:pPr>
+            <a:r>
+              <a:rPr sz="1350" b="0" i="0">
+                <a:solidFill>
+                  <a:srgbClr val="0E1116"/>
+                </a:solidFill>
+                <a:latin typeface="Segoe UI"/>
+              </a:rPr>
+              <a:t>Per-lap timing, tyre compound and age, plus 4–10 Hz car position telemetry.</a:t>
+            </a:r>
+          </a:p>
+        </p:txBody>
+      </p:sp>
+      <p:sp>
+        <p:nvSpPr>
+          <p:cNvPr id="6" name="TextBox 5"/>
+          <p:cNvSpPr txBox="1"/>
+          <p:nvPr/>
+        </p:nvSpPr>
+        <p:spPr>
+          <a:xfrm>
+            <a:off x="4434840" y="1965960"/>
+            <a:ext cx="3657600" cy="4206240"/>
+          </a:xfrm>
+          <a:prstGeom prst="rect">
+            <a:avLst/>
+          </a:prstGeom>
+          <a:noFill/>
+        </p:spPr>
+        <p:txBody>
+          <a:bodyPr wrap="square">
+            <a:spAutoFit/>
+          </a:bodyPr>
+          <a:lstStyle/>
+          <a:p>
+            <a:pPr algn="l">
+              <a:lnSpc>
+                <a:spcPct val="105000"/>
+              </a:lnSpc>
+              <a:spcBef>
+                <a:spcPts val="0"/>
+              </a:spcBef>
+              <a:spcAft>
+                <a:spcPts val="800"/>
+              </a:spcAft>
+            </a:pPr>
+            <a:r>
+              <a:rPr sz="1300" b="1" i="0">
+                <a:solidFill>
+                  <a:srgbClr val="0B6EA8"/>
+                </a:solidFill>
+                <a:latin typeface="Segoe UI"/>
+              </a:rPr>
+              <a:t>METHODS</a:t>
+            </a:r>
+          </a:p>
+          <a:p>
+            <a:pPr>
+              <a:lnSpc>
+                <a:spcPct val="108000"/>
+              </a:lnSpc>
+              <a:spcAft>
+                <a:spcPts val="800"/>
+              </a:spcAft>
+            </a:pPr>
+            <a:r>
+              <a:rPr sz="1350" b="1">
+                <a:solidFill>
+                  <a:srgbClr val="0B6EA8"/>
+                </a:solidFill>
+                <a:latin typeface="Segoe UI"/>
+              </a:rPr>
+              <a:t>•   </a:t>
+            </a:r>
+            <a:r>
+              <a:rPr sz="1350">
+                <a:solidFill>
+                  <a:srgbClr val="0E1116"/>
+                </a:solidFill>
+                <a:latin typeface="Segoe UI"/>
+              </a:rPr>
+              <a:t>Two-stage hierarchical fuel + degradation model</a:t>
+            </a:r>
+          </a:p>
+          <a:p>
+            <a:pPr>
+              <a:lnSpc>
+                <a:spcPct val="108000"/>
+              </a:lnSpc>
+              <a:spcAft>
+                <a:spcPts val="800"/>
+              </a:spcAft>
+            </a:pPr>
+            <a:r>
+              <a:rPr sz="1350" b="1">
+                <a:solidFill>
+                  <a:srgbClr val="0B6EA8"/>
+                </a:solidFill>
+                <a:latin typeface="Segoe UI"/>
+              </a:rPr>
+              <a:t>•   </a:t>
+            </a:r>
+            <a:r>
+              <a:rPr sz="1350">
+                <a:solidFill>
+                  <a:srgbClr val="0E1116"/>
+                </a:solidFill>
+                <a:latin typeface="Segoe UI"/>
+              </a:rPr>
+              <a:t>Frisch–Waugh–Lovell demeaning absorbs ~1,100 run fixed effects</a:t>
+            </a:r>
+          </a:p>
+          <a:p>
+            <a:pPr>
+              <a:lnSpc>
+                <a:spcPct val="108000"/>
+              </a:lnSpc>
+              <a:spcAft>
+                <a:spcPts val="800"/>
+              </a:spcAft>
+            </a:pPr>
+            <a:r>
+              <a:rPr sz="1350" b="1">
+                <a:solidFill>
+                  <a:srgbClr val="0B6EA8"/>
+                </a:solidFill>
+                <a:latin typeface="Segoe UI"/>
+              </a:rPr>
+              <a:t>•   </a:t>
+            </a:r>
+            <a:r>
+              <a:rPr sz="1350">
+                <a:solidFill>
+                  <a:srgbClr val="0E1116"/>
+                </a:solidFill>
+                <a:latin typeface="Segoe UI"/>
+              </a:rPr>
+              <a:t>Cluster-robust standard errors</a:t>
+            </a:r>
+          </a:p>
+          <a:p>
+            <a:pPr>
+              <a:lnSpc>
+                <a:spcPct val="108000"/>
+              </a:lnSpc>
+              <a:spcAft>
+                <a:spcPts val="800"/>
+              </a:spcAft>
+            </a:pPr>
+            <a:r>
+              <a:rPr sz="1350" b="1">
+                <a:solidFill>
+                  <a:srgbClr val="0B6EA8"/>
+                </a:solidFill>
+                <a:latin typeface="Segoe UI"/>
+              </a:rPr>
+              <a:t>•   </a:t>
+            </a:r>
+            <a:r>
+              <a:rPr sz="1350">
+                <a:solidFill>
+                  <a:srgbClr val="0E1116"/>
+                </a:solidFill>
+                <a:latin typeface="Segoe UI"/>
+              </a:rPr>
+              <a:t>KD-tree racing-line traffic measurement</a:t>
+            </a:r>
+          </a:p>
+          <a:p>
+            <a:pPr>
+              <a:lnSpc>
+                <a:spcPct val="108000"/>
+              </a:lnSpc>
+              <a:spcAft>
+                <a:spcPts val="800"/>
+              </a:spcAft>
+            </a:pPr>
+            <a:r>
+              <a:rPr sz="1350" b="1">
+                <a:solidFill>
+                  <a:srgbClr val="0B6EA8"/>
+                </a:solidFill>
+                <a:latin typeface="Segoe UI"/>
+              </a:rPr>
+              <a:t>•   </a:t>
+            </a:r>
+            <a:r>
+              <a:rPr sz="1350">
+                <a:solidFill>
+                  <a:srgbClr val="0E1116"/>
+                </a:solidFill>
+                <a:latin typeface="Segoe UI"/>
+              </a:rPr>
+              <a:t>Profile likelihood over the saturating form</a:t>
+            </a:r>
+          </a:p>
+        </p:txBody>
+      </p:sp>
+      <p:sp>
+        <p:nvSpPr>
+          <p:cNvPr id="7" name="TextBox 6"/>
+          <p:cNvSpPr txBox="1"/>
+          <p:nvPr/>
+        </p:nvSpPr>
+        <p:spPr>
+          <a:xfrm>
+            <a:off x="8321040" y="1965960"/>
+            <a:ext cx="3383280" cy="4206240"/>
+          </a:xfrm>
+          <a:prstGeom prst="rect">
+            <a:avLst/>
+          </a:prstGeom>
+          <a:noFill/>
+        </p:spPr>
+        <p:txBody>
+          <a:bodyPr wrap="square">
+            <a:spAutoFit/>
+          </a:bodyPr>
+          <a:lstStyle/>
+          <a:p>
+            <a:pPr algn="l">
+              <a:lnSpc>
+                <a:spcPct val="105000"/>
+              </a:lnSpc>
+              <a:spcBef>
+                <a:spcPts val="0"/>
+              </a:spcBef>
+              <a:spcAft>
+                <a:spcPts val="800"/>
+              </a:spcAft>
+            </a:pPr>
+            <a:r>
+              <a:rPr sz="1300" b="1" i="0">
+                <a:solidFill>
+                  <a:srgbClr val="0B6EA8"/>
+                </a:solidFill>
+                <a:latin typeface="Segoe UI"/>
+              </a:rPr>
+              <a:t>TOOLS</a:t>
+            </a:r>
+          </a:p>
+          <a:p>
+            <a:pPr algn="l">
+              <a:lnSpc>
+                <a:spcPct val="105000"/>
+              </a:lnSpc>
+              <a:spcBef>
+                <a:spcPts val="0"/>
+              </a:spcBef>
+              <a:spcAft>
+                <a:spcPts val="300"/>
+              </a:spcAft>
+            </a:pPr>
+            <a:r>
+              <a:rPr sz="1450" b="1" i="0">
+                <a:solidFill>
+                  <a:srgbClr val="0E1116"/>
+                </a:solidFill>
+                <a:latin typeface="Segoe UI"/>
+              </a:rPr>
+              <a:t>Python</a:t>
+            </a:r>
+          </a:p>
+          <a:p>
+            <a:pPr algn="l">
+              <a:lnSpc>
+                <a:spcPct val="115000"/>
+              </a:lnSpc>
+              <a:spcBef>
+                <a:spcPts val="0"/>
+              </a:spcBef>
+              <a:spcAft>
+                <a:spcPts val="1000"/>
+              </a:spcAft>
+            </a:pPr>
+            <a:r>
+              <a:rPr sz="1350" b="0" i="0">
+                <a:solidFill>
+                  <a:srgbClr val="0E1116"/>
+                </a:solidFill>
+                <a:latin typeface="Segoe UI"/>
+              </a:rPr>
+              <a:t>pandas · NumPy · statsmodels · SciPy · matplotlib</a:t>
+            </a:r>
+          </a:p>
+          <a:p>
+            <a:pPr algn="l">
+              <a:lnSpc>
+                <a:spcPct val="105000"/>
+              </a:lnSpc>
+              <a:spcBef>
+                <a:spcPts val="0"/>
+              </a:spcBef>
+              <a:spcAft>
+                <a:spcPts val="800"/>
+              </a:spcAft>
+            </a:pPr>
+            <a:r>
+              <a:rPr sz="1300" b="1" i="0">
+                <a:solidFill>
+                  <a:srgbClr val="0B6EA8"/>
+                </a:solidFill>
+                <a:latin typeface="Segoe UI"/>
+              </a:rPr>
+              <a:t>REPRODUCIBILITY</a:t>
+            </a:r>
+          </a:p>
+          <a:p>
+            <a:pPr algn="l">
+              <a:lnSpc>
+                <a:spcPct val="115000"/>
+              </a:lnSpc>
+              <a:spcBef>
+                <a:spcPts val="0"/>
+              </a:spcBef>
+              <a:spcAft>
+                <a:spcPts val="0"/>
+              </a:spcAft>
+            </a:pPr>
+            <a:r>
+              <a:rPr sz="1350" b="0" i="0">
+                <a:solidFill>
+                  <a:srgbClr val="0E1116"/>
+                </a:solidFill>
+                <a:latin typeface="Segoe UI"/>
+              </a:rPr>
+              <a:t>One script regenerates every number and figure from the cached season.</a:t>
+            </a:r>
+          </a:p>
+        </p:txBody>
+      </p:sp>
+      <p:sp>
+        <p:nvSpPr>
+          <p:cNvPr id="8" name="TextBox 7"/>
+          <p:cNvSpPr txBox="1"/>
+          <p:nvPr/>
+        </p:nvSpPr>
+        <p:spPr>
+          <a:xfrm>
+            <a:off x="502920" y="6455664"/>
+            <a:ext cx="8229600" cy="310896"/>
+          </a:xfrm>
+          <a:prstGeom prst="rect">
+            <a:avLst/>
+          </a:prstGeom>
+          <a:noFill/>
+        </p:spPr>
+        <p:txBody>
+          <a:bodyPr wrap="square">
+            <a:spAutoFit/>
+          </a:bodyPr>
+          <a:lstStyle/>
+          <a:p>
+            <a:pPr algn="l">
+              <a:lnSpc>
+                <a:spcPct val="105000"/>
+              </a:lnSpc>
+              <a:spcBef>
+                <a:spcPts val="0"/>
+              </a:spcBef>
+              <a:spcAft>
+                <a:spcPts val="0"/>
+              </a:spcAft>
+            </a:pPr>
+            <a:r>
+              <a:rPr sz="900" b="0" i="0">
+                <a:solidFill>
+                  <a:srgbClr val="8A8A8A"/>
+                </a:solidFill>
+                <a:latin typeface="Segoe UI"/>
+              </a:rPr>
+              <a:t>PITWALL  ·  TrackShift 2026</a:t>
+            </a:r>
+          </a:p>
+        </p:txBody>
+      </p:sp>
+      <p:sp>
+        <p:nvSpPr>
+          <p:cNvPr id="9" name="TextBox 8"/>
+          <p:cNvSpPr txBox="1"/>
+          <p:nvPr/>
+        </p:nvSpPr>
+        <p:spPr>
+          <a:xfrm>
+            <a:off x="10972800" y="6455664"/>
+            <a:ext cx="777240" cy="310896"/>
+          </a:xfrm>
+          <a:prstGeom prst="rect">
+            <a:avLst/>
+          </a:prstGeom>
+          <a:noFill/>
+        </p:spPr>
+        <p:txBody>
+          <a:bodyPr wrap="square">
+            <a:spAutoFit/>
+          </a:bodyPr>
+          <a:lstStyle/>
+          <a:p>
+            <a:pPr algn="r">
+              <a:lnSpc>
+                <a:spcPct val="105000"/>
+              </a:lnSpc>
+              <a:spcBef>
+                <a:spcPts val="0"/>
+              </a:spcBef>
+              <a:spcAft>
+                <a:spcPts val="0"/>
+              </a:spcAft>
+            </a:pPr>
+            <a:r>
+              <a:rPr sz="900" b="0" i="0">
+                <a:solidFill>
+                  <a:srgbClr val="8A8A8A"/>
+                </a:solidFill>
+                <a:latin typeface="Segoe UI"/>
+              </a:rPr>
+              <a:t>12</a:t>
+            </a:r>
+          </a:p>
+        </p:txBody>
+      </p:sp>
+    </p:spTree>
+  </p:cSld>
+  <p:clrMapOvr>
+    <a:masterClrMapping/>
+  </p:clrMapOvr>
+</p:sld>
+</file>
+
+<file path=ppt/slides/slide13.xml><?xml version="1.0" encoding="utf-8"?>
 <p:sld xmlns:a="http://schemas.openxmlformats.org/drawingml/2006/main" xmlns:p="http://schemas.openxmlformats.org/presentationml/2006/main" xmlns:r="http://schemas.openxmlformats.org/officeDocument/2006/relationships">
   <p:cSld>
     <p:bg>
@@ -5256,7 +5917,7 @@
                 </a:solidFill>
                 <a:latin typeface="Segoe UI"/>
               </a:rPr>
-              <a:t>+11.9%</a:t>
+              <a:t>+11.1%</a:t>
             </a:r>
           </a:p>
           <a:p>
@@ -8235,7 +8896,7 @@
                 </a:solidFill>
                 <a:latin typeface="Segoe UI"/>
               </a:rPr>
-              <a:t>+11.9%   </a:t>
+              <a:t>+11.1%   </a:t>
             </a:r>
             <a:r>
               <a:rPr sz="1450">
@@ -8244,7 +8905,7 @@
                 </a:solidFill>
                 <a:latin typeface="Segoe UI"/>
               </a:rPr>
-              <a:t>RMSE over the season-mean baseline; calibration slope 0.82; wins 7 of 11 held-out events.</a:t>
+              <a:t>RMSE over the season-mean baseline; calibration slope 0.79; wins 7 of 11 held-out events.</a:t>
             </a:r>
           </a:p>
           <a:p>
@@ -8272,7 +8933,7 @@
                 </a:solidFill>
                 <a:latin typeface="Segoe UI"/>
               </a:rPr>
-              <a:t>Robust to method-blind outlier caps (+10–12% across all cuts).</a:t>
+              <a:t>Robust to method-blind outlier caps (+9.6–11.1% across all cuts).</a:t>
             </a:r>
           </a:p>
           <a:p>
@@ -8300,7 +8961,7 @@
                 </a:solidFill>
                 <a:latin typeface="Segoe UI"/>
               </a:rPr>
-              <a:t>Signal: compound pair, track temp (+0.041 s/°C, p&lt;0.001) and traffic (+0.50 s, p=0.003). Tyre age is reported but not deployed — it costs accuracy out of sample.</a:t>
+              <a:t>Signal: compound pair, track temp (+0.039 s/°C, p&lt;0.001) and traffic (+0.50 s, p=0.003). Tyre age is reported but not deployed — it costs accuracy out of sample.</a:t>
             </a:r>
           </a:p>
         </p:txBody>
@@ -8842,6 +9503,31 @@
                 </a:solidFill>
                 <a:latin typeface="Segoe UI"/>
               </a:rPr>
+              <a:t>RMSE, out of sample    </a:t>
+            </a:r>
+            <a:r>
+              <a:rPr sz="1400" b="1">
+                <a:solidFill>
+                  <a:srgbClr val="1A7F4B"/>
+                </a:solidFill>
+                <a:latin typeface="Segoe UI"/>
+              </a:rPr>
+              <a:t>0.96 s/lap</a:t>
+            </a:r>
+          </a:p>
+          <a:p>
+            <a:pPr>
+              <a:spcAft>
+                <a:spcPts val="1000"/>
+              </a:spcAft>
+            </a:pPr>
+            <a:r>
+              <a:rPr sz="1400">
+                <a:solidFill>
+                  <a:srgbClr val="0E1116"/>
+                </a:solidFill>
+                <a:latin typeface="Segoe UI"/>
+              </a:rPr>
               <a:t>RMSE gain vs season mean    </a:t>
             </a:r>
             <a:r>
@@ -8851,7 +9537,7 @@
                 </a:solidFill>
                 <a:latin typeface="Segoe UI"/>
               </a:rPr>
-              <a:t>+11.9%</a:t>
+              <a:t>+11.1%</a:t>
             </a:r>
           </a:p>
           <a:p>
@@ -8876,7 +9562,7 @@
                 </a:solidFill>
                 <a:latin typeface="Segoe UI"/>
               </a:rPr>
-              <a:t>0.82</a:t>
+              <a:t>0.79</a:t>
             </a:r>
           </a:p>
           <a:p>
